--- a/.cursor/skills/exec-deck-builder/assets/example_brand.pptx
+++ b/.cursor/skills/exec-deck-builder/assets/example_brand.pptx
@@ -314,7 +314,7 @@
         <c:spPr>
           <a:ln w="19050">
             <a:solidFill>
-              <a:srgbClr val="4A79B8"/>
+              <a:srgbClr val="3A6DA8"/>
             </a:solidFill>
           </a:ln>
         </c:spPr>
@@ -325,7 +325,7 @@
             <a:pPr>
               <a:defRPr sz="2400">
                 <a:solidFill>
-                  <a:srgbClr val="D7E2EF"/>
+                  <a:srgbClr val="B1C8E2"/>
                 </a:solidFill>
                 <a:latin typeface="Arial"/>
                 <a:ea typeface="微软雅黑"/>
@@ -350,7 +350,7 @@
           <c:spPr>
             <a:ln w="12700">
               <a:solidFill>
-                <a:srgbClr val="4A79B8"/>
+                <a:srgbClr val="3A6DA8"/>
               </a:solidFill>
             </a:ln>
           </c:spPr>
@@ -362,7 +362,7 @@
         <c:spPr>
           <a:ln w="19050">
             <a:solidFill>
-              <a:srgbClr val="4A79B8"/>
+              <a:srgbClr val="3A6DA8"/>
             </a:solidFill>
           </a:ln>
         </c:spPr>
@@ -373,7 +373,7 @@
             <a:pPr>
               <a:defRPr sz="2400">
                 <a:solidFill>
-                  <a:srgbClr val="D7E2EF"/>
+                  <a:srgbClr val="B1C8E2"/>
                 </a:solidFill>
                 <a:latin typeface="Arial"/>
                 <a:ea typeface="微软雅黑"/>
@@ -396,7 +396,7 @@
           <a:pPr>
             <a:defRPr sz="2400">
               <a:solidFill>
-                <a:srgbClr val="D7E2EF"/>
+                <a:srgbClr val="B1C8E2"/>
               </a:solidFill>
               <a:latin typeface="Arial"/>
               <a:ea typeface="微软雅黑"/>
@@ -415,7 +415,7 @@
       <a:pPr>
         <a:defRPr sz="2400">
           <a:solidFill>
-            <a:srgbClr val="D7E2EF"/>
+            <a:srgbClr val="B1C8E2"/>
           </a:solidFill>
           <a:latin typeface="Arial"/>
           <a:ea typeface="微软雅黑"/>
@@ -3520,7 +3520,7 @@
             <a:r>
               <a:rPr sz="2500" b="1" i="0">
                 <a:solidFill>
-                  <a:srgbClr val="F4E09F"/>
+                  <a:srgbClr val="F0C22D"/>
                 </a:solidFill>
                 <a:latin typeface="Arial"/>
                 <a:ea typeface="微软雅黑"/>
@@ -3646,7 +3646,7 @@
             <a:r>
               <a:rPr sz="3600" b="0" i="0">
                 <a:solidFill>
-                  <a:srgbClr val="D7E2EF"/>
+                  <a:srgbClr val="B1C8E2"/>
                 </a:solidFill>
                 <a:latin typeface="Arial"/>
                 <a:ea typeface="微软雅黑"/>
@@ -3673,7 +3673,7 @@
           </a:prstGeom>
           <a:ln w="19050">
             <a:solidFill>
-              <a:srgbClr val="4A79B8"/>
+              <a:srgbClr val="3A6DA8"/>
             </a:solidFill>
           </a:ln>
         </p:spPr>
@@ -3722,7 +3722,7 @@
             <a:r>
               <a:rPr sz="2400" b="0" i="0">
                 <a:solidFill>
-                  <a:srgbClr val="D7E2EF"/>
+                  <a:srgbClr val="B1C8E2"/>
                 </a:solidFill>
                 <a:latin typeface="Arial"/>
                 <a:ea typeface="微软雅黑"/>
@@ -3789,7 +3789,7 @@
             <a:r>
               <a:rPr sz="2300" b="1" i="0">
                 <a:solidFill>
-                  <a:srgbClr val="F4E09F"/>
+                  <a:srgbClr val="F0C22D"/>
                 </a:solidFill>
                 <a:latin typeface="Arial"/>
                 <a:ea typeface="微软雅黑"/>
@@ -3858,7 +3858,7 @@
             </a:avLst>
           </a:prstGeom>
           <a:solidFill>
-            <a:srgbClr val="0B4880"/>
+            <a:srgbClr val="0A3F70"/>
           </a:solidFill>
           <a:ln>
             <a:noFill/>
@@ -3928,7 +3928,7 @@
             <a:r>
               <a:rPr sz="3360" b="0" i="0">
                 <a:solidFill>
-                  <a:srgbClr val="D7E2EF"/>
+                  <a:srgbClr val="B1C8E2"/>
                 </a:solidFill>
                 <a:latin typeface="Arial"/>
                 <a:ea typeface="微软雅黑"/>
@@ -3969,7 +3969,7 @@
             <a:r>
               <a:rPr sz="2300" b="0" i="0">
                 <a:solidFill>
-                  <a:srgbClr val="D7E2EF"/>
+                  <a:srgbClr val="B1C8E2"/>
                 </a:solidFill>
                 <a:latin typeface="Arial"/>
                 <a:ea typeface="微软雅黑"/>
@@ -4010,7 +4010,7 @@
             <a:r>
               <a:rPr sz="2040" b="0" i="0">
                 <a:solidFill>
-                  <a:srgbClr val="B9EED4"/>
+                  <a:srgbClr val="39E08D"/>
                 </a:solidFill>
                 <a:latin typeface="Arial"/>
                 <a:ea typeface="微软雅黑"/>
@@ -4021,7 +4021,7 @@
             <a:r>
               <a:rPr sz="2400" b="1" i="0">
                 <a:solidFill>
-                  <a:srgbClr val="B9EED4"/>
+                  <a:srgbClr val="39E08D"/>
                 </a:solidFill>
                 <a:latin typeface="Arial"/>
                 <a:ea typeface="微软雅黑"/>
@@ -4049,7 +4049,7 @@
             </a:avLst>
           </a:prstGeom>
           <a:solidFill>
-            <a:srgbClr val="0B4880"/>
+            <a:srgbClr val="0A3F70"/>
           </a:solidFill>
           <a:ln>
             <a:noFill/>
@@ -4108,7 +4108,7 @@
             <a:r>
               <a:rPr sz="8000" b="1" i="0">
                 <a:solidFill>
-                  <a:srgbClr val="F4E09F"/>
+                  <a:srgbClr val="F0C22D"/>
                 </a:solidFill>
                 <a:latin typeface="Arial"/>
                 <a:ea typeface="微软雅黑"/>
@@ -4119,7 +4119,7 @@
             <a:r>
               <a:rPr sz="3360" b="0" i="0">
                 <a:solidFill>
-                  <a:srgbClr val="D7E2EF"/>
+                  <a:srgbClr val="B1C8E2"/>
                 </a:solidFill>
                 <a:latin typeface="Arial"/>
                 <a:ea typeface="微软雅黑"/>
@@ -4160,7 +4160,7 @@
             <a:r>
               <a:rPr sz="2300" b="0" i="0">
                 <a:solidFill>
-                  <a:srgbClr val="D7E2EF"/>
+                  <a:srgbClr val="B1C8E2"/>
                 </a:solidFill>
                 <a:latin typeface="Arial"/>
                 <a:ea typeface="微软雅黑"/>
@@ -4201,7 +4201,7 @@
             <a:r>
               <a:rPr sz="2040" b="0" i="0">
                 <a:solidFill>
-                  <a:srgbClr val="B9EED4"/>
+                  <a:srgbClr val="39E08D"/>
                 </a:solidFill>
                 <a:latin typeface="Arial"/>
                 <a:ea typeface="微软雅黑"/>
@@ -4212,7 +4212,7 @@
             <a:r>
               <a:rPr sz="2400" b="1" i="0">
                 <a:solidFill>
-                  <a:srgbClr val="B9EED4"/>
+                  <a:srgbClr val="39E08D"/>
                 </a:solidFill>
                 <a:latin typeface="Arial"/>
                 <a:ea typeface="微软雅黑"/>
@@ -4240,7 +4240,7 @@
             </a:avLst>
           </a:prstGeom>
           <a:solidFill>
-            <a:srgbClr val="0B4880"/>
+            <a:srgbClr val="0A3F70"/>
           </a:solidFill>
           <a:ln>
             <a:noFill/>
@@ -4310,7 +4310,7 @@
             <a:r>
               <a:rPr sz="3360" b="0" i="0">
                 <a:solidFill>
-                  <a:srgbClr val="D7E2EF"/>
+                  <a:srgbClr val="B1C8E2"/>
                 </a:solidFill>
                 <a:latin typeface="Arial"/>
                 <a:ea typeface="微软雅黑"/>
@@ -4351,7 +4351,7 @@
             <a:r>
               <a:rPr sz="2300" b="0" i="0">
                 <a:solidFill>
-                  <a:srgbClr val="D7E2EF"/>
+                  <a:srgbClr val="B1C8E2"/>
                 </a:solidFill>
                 <a:latin typeface="Arial"/>
                 <a:ea typeface="微软雅黑"/>
@@ -4392,7 +4392,7 @@
             <a:r>
               <a:rPr sz="2040" b="0" i="0">
                 <a:solidFill>
-                  <a:srgbClr val="B9EED4"/>
+                  <a:srgbClr val="39E08D"/>
                 </a:solidFill>
                 <a:latin typeface="Arial"/>
                 <a:ea typeface="微软雅黑"/>
@@ -4403,7 +4403,7 @@
             <a:r>
               <a:rPr sz="2400" b="1" i="0">
                 <a:solidFill>
-                  <a:srgbClr val="B9EED4"/>
+                  <a:srgbClr val="39E08D"/>
                 </a:solidFill>
                 <a:latin typeface="Arial"/>
                 <a:ea typeface="微软雅黑"/>
@@ -4431,7 +4431,7 @@
             </a:avLst>
           </a:prstGeom>
           <a:solidFill>
-            <a:srgbClr val="0B4880"/>
+            <a:srgbClr val="0A3F70"/>
           </a:solidFill>
           <a:ln>
             <a:noFill/>
@@ -4501,7 +4501,7 @@
             <a:r>
               <a:rPr sz="3360" b="0" i="0">
                 <a:solidFill>
-                  <a:srgbClr val="D7E2EF"/>
+                  <a:srgbClr val="B1C8E2"/>
                 </a:solidFill>
                 <a:latin typeface="Arial"/>
                 <a:ea typeface="微软雅黑"/>
@@ -4542,7 +4542,7 @@
             <a:r>
               <a:rPr sz="2300" b="0" i="0">
                 <a:solidFill>
-                  <a:srgbClr val="D7E2EF"/>
+                  <a:srgbClr val="B1C8E2"/>
                 </a:solidFill>
                 <a:latin typeface="Arial"/>
                 <a:ea typeface="微软雅黑"/>
@@ -4583,7 +4583,7 @@
             <a:r>
               <a:rPr sz="2040" b="0" i="0">
                 <a:solidFill>
-                  <a:srgbClr val="B9EED4"/>
+                  <a:srgbClr val="39E08D"/>
                 </a:solidFill>
                 <a:latin typeface="Arial"/>
                 <a:ea typeface="微软雅黑"/>
@@ -4594,7 +4594,7 @@
             <a:r>
               <a:rPr sz="2400" b="1" i="0">
                 <a:solidFill>
-                  <a:srgbClr val="B9EED4"/>
+                  <a:srgbClr val="39E08D"/>
                 </a:solidFill>
                 <a:latin typeface="Arial"/>
                 <a:ea typeface="微软雅黑"/>
@@ -4761,7 +4761,7 @@
             <a:r>
               <a:rPr sz="2576" b="0" i="0">
                 <a:solidFill>
-                  <a:srgbClr val="D7E2EF"/>
+                  <a:srgbClr val="B1C8E2"/>
                 </a:solidFill>
                 <a:latin typeface="Arial"/>
                 <a:ea typeface="微软雅黑"/>
@@ -4887,7 +4887,7 @@
             <a:r>
               <a:rPr sz="2576" b="0" i="0">
                 <a:solidFill>
-                  <a:srgbClr val="D7E2EF"/>
+                  <a:srgbClr val="B1C8E2"/>
                 </a:solidFill>
                 <a:latin typeface="Arial"/>
                 <a:ea typeface="微软雅黑"/>
@@ -5013,7 +5013,7 @@
             <a:r>
               <a:rPr sz="2576" b="0" i="0">
                 <a:solidFill>
-                  <a:srgbClr val="D7E2EF"/>
+                  <a:srgbClr val="B1C8E2"/>
                 </a:solidFill>
                 <a:latin typeface="Arial"/>
                 <a:ea typeface="微软雅黑"/>
@@ -5095,7 +5095,7 @@
             <a:r>
               <a:rPr sz="2520" b="1" i="0">
                 <a:solidFill>
-                  <a:srgbClr val="F4E09F"/>
+                  <a:srgbClr val="F0C22D"/>
                 </a:solidFill>
                 <a:latin typeface="Arial"/>
                 <a:ea typeface="微软雅黑"/>
@@ -5177,7 +5177,7 @@
             <a:r>
               <a:rPr sz="2520" b="1" i="0">
                 <a:solidFill>
-                  <a:srgbClr val="F4E09F"/>
+                  <a:srgbClr val="F0C22D"/>
                 </a:solidFill>
                 <a:latin typeface="Arial"/>
                 <a:ea typeface="微软雅黑"/>
@@ -5259,7 +5259,7 @@
             <a:r>
               <a:rPr sz="2520" b="1" i="0">
                 <a:solidFill>
-                  <a:srgbClr val="F4E09F"/>
+                  <a:srgbClr val="F0C22D"/>
                 </a:solidFill>
                 <a:latin typeface="Arial"/>
                 <a:ea typeface="微软雅黑"/>
@@ -5341,7 +5341,7 @@
             <a:r>
               <a:rPr sz="1900" b="0" i="0">
                 <a:solidFill>
-                  <a:srgbClr val="D7E2EF"/>
+                  <a:srgbClr val="B1C8E2"/>
                 </a:solidFill>
                 <a:latin typeface="Arial"/>
                 <a:ea typeface="微软雅黑"/>
@@ -5382,7 +5382,7 @@
             <a:r>
               <a:rPr sz="1900" b="0" i="0">
                 <a:solidFill>
-                  <a:srgbClr val="D7E2EF"/>
+                  <a:srgbClr val="B1C8E2"/>
                 </a:solidFill>
                 <a:latin typeface="Arial"/>
                 <a:ea typeface="微软雅黑"/>
@@ -5449,7 +5449,7 @@
             <a:r>
               <a:rPr sz="2300" b="1" i="0">
                 <a:solidFill>
-                  <a:srgbClr val="F4E09F"/>
+                  <a:srgbClr val="F0C22D"/>
                 </a:solidFill>
                 <a:latin typeface="Arial"/>
                 <a:ea typeface="微软雅黑"/>
@@ -5712,7 +5712,7 @@
             <a:r>
               <a:rPr sz="1900" b="0" i="0">
                 <a:solidFill>
-                  <a:srgbClr val="D7E2EF"/>
+                  <a:srgbClr val="B1C8E2"/>
                 </a:solidFill>
                 <a:latin typeface="Arial"/>
                 <a:ea typeface="微软雅黑"/>
@@ -5753,7 +5753,7 @@
             <a:r>
               <a:rPr sz="1900" b="0" i="0">
                 <a:solidFill>
-                  <a:srgbClr val="D7E2EF"/>
+                  <a:srgbClr val="B1C8E2"/>
                 </a:solidFill>
                 <a:latin typeface="Arial"/>
                 <a:ea typeface="微软雅黑"/>

--- a/.cursor/skills/exec-deck-builder/assets/example_brand.pptx
+++ b/.cursor/skills/exec-deck-builder/assets/example_brand.pptx
@@ -3498,7 +3498,7 @@
         </p:nvSpPr>
         <p:spPr>
           <a:xfrm>
-            <a:off x="1572773" y="3346716"/>
+            <a:off x="1572773" y="3342327"/>
             <a:ext cx="21238482" cy="548642"/>
           </a:xfrm>
           <a:prstGeom prst="rect">
@@ -3539,7 +3539,7 @@
         </p:nvSpPr>
         <p:spPr>
           <a:xfrm>
-            <a:off x="1572773" y="4114815"/>
+            <a:off x="1572773" y="4110426"/>
             <a:ext cx="164592" cy="1133860"/>
           </a:xfrm>
           <a:prstGeom prst="rect">
@@ -3583,7 +3583,7 @@
         </p:nvSpPr>
         <p:spPr>
           <a:xfrm>
-            <a:off x="2121415" y="4114815"/>
+            <a:off x="2121415" y="4110426"/>
             <a:ext cx="20689840" cy="1178564"/>
           </a:xfrm>
           <a:prstGeom prst="rect">
@@ -3624,7 +3624,7 @@
         </p:nvSpPr>
         <p:spPr>
           <a:xfrm>
-            <a:off x="2121415" y="5695717"/>
+            <a:off x="2121415" y="5691328"/>
             <a:ext cx="16990786" cy="594362"/>
           </a:xfrm>
           <a:prstGeom prst="rect">
@@ -3850,7 +3850,7 @@
         <p:spPr>
           <a:xfrm>
             <a:off x="1133860" y="2737622"/>
-            <a:ext cx="5199892" cy="3566173"/>
+            <a:ext cx="5199892" cy="3484283"/>
           </a:xfrm>
           <a:prstGeom prst="roundRect">
             <a:avLst>
@@ -3895,7 +3895,7 @@
         </p:nvSpPr>
         <p:spPr>
           <a:xfrm>
-            <a:off x="1536197" y="3424440"/>
+            <a:off x="1536197" y="3383495"/>
             <a:ext cx="4395217" cy="1168404"/>
           </a:xfrm>
           <a:prstGeom prst="rect">
@@ -3947,7 +3947,7 @@
         </p:nvSpPr>
         <p:spPr>
           <a:xfrm>
-            <a:off x="1536197" y="4702573"/>
+            <a:off x="1536197" y="4661628"/>
             <a:ext cx="4395217" cy="438913"/>
           </a:xfrm>
           <a:prstGeom prst="rect">
@@ -3988,7 +3988,7 @@
         </p:nvSpPr>
         <p:spPr>
           <a:xfrm>
-            <a:off x="1536197" y="5141487"/>
+            <a:off x="1536197" y="5100542"/>
             <a:ext cx="4395217" cy="475489"/>
           </a:xfrm>
           <a:prstGeom prst="rect">
@@ -4041,7 +4041,7 @@
         <p:spPr>
           <a:xfrm>
             <a:off x="6772666" y="2737622"/>
-            <a:ext cx="5199892" cy="3566173"/>
+            <a:ext cx="5199892" cy="3484283"/>
           </a:xfrm>
           <a:prstGeom prst="roundRect">
             <a:avLst>
@@ -4086,7 +4086,7 @@
         </p:nvSpPr>
         <p:spPr>
           <a:xfrm>
-            <a:off x="7175003" y="3424440"/>
+            <a:off x="7175003" y="3383495"/>
             <a:ext cx="4395217" cy="1168404"/>
           </a:xfrm>
           <a:prstGeom prst="rect">
@@ -4138,7 +4138,7 @@
         </p:nvSpPr>
         <p:spPr>
           <a:xfrm>
-            <a:off x="7175003" y="4702573"/>
+            <a:off x="7175003" y="4661628"/>
             <a:ext cx="4395217" cy="438913"/>
           </a:xfrm>
           <a:prstGeom prst="rect">
@@ -4179,7 +4179,7 @@
         </p:nvSpPr>
         <p:spPr>
           <a:xfrm>
-            <a:off x="7175003" y="5141487"/>
+            <a:off x="7175003" y="5100542"/>
             <a:ext cx="4395217" cy="475489"/>
           </a:xfrm>
           <a:prstGeom prst="rect">
@@ -4232,7 +4232,7 @@
         <p:spPr>
           <a:xfrm>
             <a:off x="12411472" y="2737622"/>
-            <a:ext cx="5199892" cy="3566173"/>
+            <a:ext cx="5199892" cy="3484283"/>
           </a:xfrm>
           <a:prstGeom prst="roundRect">
             <a:avLst>
@@ -4277,7 +4277,7 @@
         </p:nvSpPr>
         <p:spPr>
           <a:xfrm>
-            <a:off x="12813809" y="3424440"/>
+            <a:off x="12813809" y="3383495"/>
             <a:ext cx="4395217" cy="1168404"/>
           </a:xfrm>
           <a:prstGeom prst="rect">
@@ -4329,7 +4329,7 @@
         </p:nvSpPr>
         <p:spPr>
           <a:xfrm>
-            <a:off x="12813809" y="4702573"/>
+            <a:off x="12813809" y="4661628"/>
             <a:ext cx="4395217" cy="438913"/>
           </a:xfrm>
           <a:prstGeom prst="rect">
@@ -4370,7 +4370,7 @@
         </p:nvSpPr>
         <p:spPr>
           <a:xfrm>
-            <a:off x="12813809" y="5141487"/>
+            <a:off x="12813809" y="5100542"/>
             <a:ext cx="4395217" cy="475489"/>
           </a:xfrm>
           <a:prstGeom prst="rect">
@@ -4423,7 +4423,7 @@
         <p:spPr>
           <a:xfrm>
             <a:off x="18050277" y="2737622"/>
-            <a:ext cx="5199892" cy="3566173"/>
+            <a:ext cx="5199892" cy="3484283"/>
           </a:xfrm>
           <a:prstGeom prst="roundRect">
             <a:avLst>
@@ -4468,7 +4468,7 @@
         </p:nvSpPr>
         <p:spPr>
           <a:xfrm>
-            <a:off x="18452615" y="3424440"/>
+            <a:off x="18452615" y="3383495"/>
             <a:ext cx="4395217" cy="1168404"/>
           </a:xfrm>
           <a:prstGeom prst="rect">
@@ -4520,7 +4520,7 @@
         </p:nvSpPr>
         <p:spPr>
           <a:xfrm>
-            <a:off x="18452615" y="4702573"/>
+            <a:off x="18452615" y="4661628"/>
             <a:ext cx="4395217" cy="438913"/>
           </a:xfrm>
           <a:prstGeom prst="rect">
@@ -4561,7 +4561,7 @@
         </p:nvSpPr>
         <p:spPr>
           <a:xfrm>
-            <a:off x="18452615" y="5141487"/>
+            <a:off x="18452615" y="5100542"/>
             <a:ext cx="4395217" cy="475489"/>
           </a:xfrm>
           <a:prstGeom prst="rect">
@@ -4613,7 +4613,7 @@
         </p:nvSpPr>
         <p:spPr>
           <a:xfrm>
-            <a:off x="1133860" y="6872960"/>
+            <a:off x="1133860" y="6697395"/>
             <a:ext cx="10747257" cy="512065"/>
           </a:xfrm>
           <a:prstGeom prst="rect">
@@ -4654,7 +4654,7 @@
         </p:nvSpPr>
         <p:spPr>
           <a:xfrm>
-            <a:off x="1133860" y="7738596"/>
+            <a:off x="1133860" y="7563030"/>
             <a:ext cx="120904" cy="120904"/>
           </a:xfrm>
           <a:prstGeom prst="ellipse">
@@ -4698,7 +4698,7 @@
         </p:nvSpPr>
         <p:spPr>
           <a:xfrm>
-            <a:off x="1510797" y="7567907"/>
+            <a:off x="1510797" y="7392342"/>
             <a:ext cx="10370320" cy="462281"/>
           </a:xfrm>
           <a:prstGeom prst="rect">
@@ -4739,7 +4739,7 @@
         </p:nvSpPr>
         <p:spPr>
           <a:xfrm>
-            <a:off x="1510797" y="8103341"/>
+            <a:off x="1510797" y="7927776"/>
             <a:ext cx="10370320" cy="438385"/>
           </a:xfrm>
           <a:prstGeom prst="rect">
@@ -4780,7 +4780,7 @@
         </p:nvSpPr>
         <p:spPr>
           <a:xfrm>
-            <a:off x="1133860" y="8968448"/>
+            <a:off x="1133860" y="8792883"/>
             <a:ext cx="120904" cy="120904"/>
           </a:xfrm>
           <a:prstGeom prst="ellipse">
@@ -4824,7 +4824,7 @@
         </p:nvSpPr>
         <p:spPr>
           <a:xfrm>
-            <a:off x="1510797" y="8797759"/>
+            <a:off x="1510797" y="8622194"/>
             <a:ext cx="10370320" cy="462281"/>
           </a:xfrm>
           <a:prstGeom prst="rect">
@@ -4865,7 +4865,7 @@
         </p:nvSpPr>
         <p:spPr>
           <a:xfrm>
-            <a:off x="1510797" y="9333193"/>
+            <a:off x="1510797" y="9157628"/>
             <a:ext cx="10370320" cy="438385"/>
           </a:xfrm>
           <a:prstGeom prst="rect">
@@ -4906,7 +4906,7 @@
         </p:nvSpPr>
         <p:spPr>
           <a:xfrm>
-            <a:off x="1133860" y="10198300"/>
+            <a:off x="1133860" y="10022735"/>
             <a:ext cx="120904" cy="120904"/>
           </a:xfrm>
           <a:prstGeom prst="ellipse">
@@ -4950,7 +4950,7 @@
         </p:nvSpPr>
         <p:spPr>
           <a:xfrm>
-            <a:off x="1510797" y="10027612"/>
+            <a:off x="1510797" y="9852046"/>
             <a:ext cx="10370320" cy="462281"/>
           </a:xfrm>
           <a:prstGeom prst="rect">
@@ -4991,7 +4991,7 @@
         </p:nvSpPr>
         <p:spPr>
           <a:xfrm>
-            <a:off x="1510797" y="10563046"/>
+            <a:off x="1510797" y="10387480"/>
             <a:ext cx="10370320" cy="438385"/>
           </a:xfrm>
           <a:prstGeom prst="rect">
@@ -5032,7 +5032,7 @@
         </p:nvSpPr>
         <p:spPr>
           <a:xfrm>
-            <a:off x="12502912" y="6872960"/>
+            <a:off x="12502912" y="6697395"/>
             <a:ext cx="10747257" cy="512065"/>
           </a:xfrm>
           <a:prstGeom prst="rect">
@@ -5073,7 +5073,7 @@
         </p:nvSpPr>
         <p:spPr>
           <a:xfrm>
-            <a:off x="12502912" y="7567907"/>
+            <a:off x="12502912" y="7392342"/>
             <a:ext cx="694946" cy="462281"/>
           </a:xfrm>
           <a:prstGeom prst="rect">
@@ -5114,7 +5114,7 @@
         </p:nvSpPr>
         <p:spPr>
           <a:xfrm>
-            <a:off x="13344163" y="7567907"/>
+            <a:off x="13344163" y="7392342"/>
             <a:ext cx="9906006" cy="462281"/>
           </a:xfrm>
           <a:prstGeom prst="rect">
@@ -5155,7 +5155,7 @@
         </p:nvSpPr>
         <p:spPr>
           <a:xfrm>
-            <a:off x="12502912" y="8359374"/>
+            <a:off x="12502912" y="8183809"/>
             <a:ext cx="694946" cy="462281"/>
           </a:xfrm>
           <a:prstGeom prst="rect">
@@ -5196,7 +5196,7 @@
         </p:nvSpPr>
         <p:spPr>
           <a:xfrm>
-            <a:off x="13344163" y="8359374"/>
+            <a:off x="13344163" y="8183809"/>
             <a:ext cx="9906006" cy="462281"/>
           </a:xfrm>
           <a:prstGeom prst="rect">
@@ -5237,7 +5237,7 @@
         </p:nvSpPr>
         <p:spPr>
           <a:xfrm>
-            <a:off x="12502912" y="9150841"/>
+            <a:off x="12502912" y="8975276"/>
             <a:ext cx="694946" cy="462281"/>
           </a:xfrm>
           <a:prstGeom prst="rect">
@@ -5278,7 +5278,7 @@
         </p:nvSpPr>
         <p:spPr>
           <a:xfrm>
-            <a:off x="13344163" y="9150841"/>
+            <a:off x="13344163" y="8975276"/>
             <a:ext cx="9906006" cy="462281"/>
           </a:xfrm>
           <a:prstGeom prst="rect">
@@ -5319,7 +5319,7 @@
         </p:nvSpPr>
         <p:spPr>
           <a:xfrm>
-            <a:off x="1133860" y="12655343"/>
+            <a:off x="1133860" y="12179853"/>
             <a:ext cx="22116309" cy="438913"/>
           </a:xfrm>
           <a:prstGeom prst="rect">
@@ -5360,7 +5360,7 @@
         </p:nvSpPr>
         <p:spPr>
           <a:xfrm>
-            <a:off x="21421363" y="12655343"/>
+            <a:off x="21421363" y="12179853"/>
             <a:ext cx="1828806" cy="438913"/>
           </a:xfrm>
           <a:prstGeom prst="rect">
@@ -5511,7 +5511,7 @@
         </p:nvGraphicFramePr>
         <p:xfrm>
           <a:off x="1133860" y="2737622"/>
-          <a:ext cx="22116309" cy="7250822"/>
+          <a:ext cx="22116309" cy="6908470"/>
         </p:xfrm>
         <a:graphic>
           <a:graphicData uri="http://schemas.openxmlformats.org/drawingml/2006/chart">
@@ -5527,8 +5527,8 @@
         </p:nvSpPr>
         <p:spPr>
           <a:xfrm>
-            <a:off x="1133860" y="10317630"/>
-            <a:ext cx="22116309" cy="2045103"/>
+            <a:off x="1133860" y="9975277"/>
+            <a:ext cx="22116309" cy="1948542"/>
           </a:xfrm>
           <a:prstGeom prst="roundRect">
             <a:avLst>
@@ -5573,8 +5573,8 @@
         </p:nvSpPr>
         <p:spPr>
           <a:xfrm>
-            <a:off x="1572773" y="10610239"/>
-            <a:ext cx="1328932" cy="1459885"/>
+            <a:off x="1572773" y="10267886"/>
+            <a:ext cx="1328932" cy="1363324"/>
           </a:xfrm>
           <a:prstGeom prst="rect">
             <a:avLst/>
@@ -5614,8 +5614,8 @@
         </p:nvCxnSpPr>
         <p:spPr>
           <a:xfrm>
-            <a:off x="3066299" y="10719967"/>
-            <a:ext cx="0" cy="1240429"/>
+            <a:off x="3066299" y="10377615"/>
+            <a:ext cx="0" cy="1143868"/>
           </a:xfrm>
           <a:prstGeom prst="line">
             <a:avLst/>
@@ -5649,8 +5649,8 @@
         </p:nvSpPr>
         <p:spPr>
           <a:xfrm>
-            <a:off x="3230892" y="10610239"/>
-            <a:ext cx="19580364" cy="1459885"/>
+            <a:off x="3230892" y="10267886"/>
+            <a:ext cx="19580364" cy="1363324"/>
           </a:xfrm>
           <a:prstGeom prst="rect">
             <a:avLst/>
@@ -5690,7 +5690,7 @@
         </p:nvSpPr>
         <p:spPr>
           <a:xfrm>
-            <a:off x="1133860" y="12655343"/>
+            <a:off x="1133860" y="12179853"/>
             <a:ext cx="22116309" cy="438913"/>
           </a:xfrm>
           <a:prstGeom prst="rect">
@@ -5731,7 +5731,7 @@
         </p:nvSpPr>
         <p:spPr>
           <a:xfrm>
-            <a:off x="21421363" y="12655343"/>
+            <a:off x="21421363" y="12179853"/>
             <a:ext cx="1828806" cy="438913"/>
           </a:xfrm>
           <a:prstGeom prst="rect">
